--- a/01_Foundations/slides/1_2_regression.pptx
+++ b/01_Foundations/slides/1_2_regression.pptx
@@ -131,6 +131,299 @@
 </p:presentation>
 </file>
 
+<file path=ppt/revisionInfo.xml><?xml version="1.0" encoding="utf-8"?>
+<p1510:revInfo xmlns:a="http://schemas.openxmlformats.org/drawingml/2006/main" xmlns:r="http://schemas.openxmlformats.org/officeDocument/2006/relationships" xmlns:p1510="http://schemas.microsoft.com/office/powerpoint/2015/10/main">
+  <p1510:revLst>
+    <p1510:client id="{7DAC20AD-377C-4F9D-93A0-C854F241D68E}" v="18" dt="2026-10-19T14:17:19.381"/>
+  </p1510:revLst>
+</p1510:revInfo>
+</file>
+
+<file path=ppt/changesInfos/changesInfo1.xml><?xml version="1.0" encoding="utf-8"?>
+<pc:chgInfo xmlns:a="http://schemas.openxmlformats.org/drawingml/2006/main" xmlns:r="http://schemas.openxmlformats.org/officeDocument/2006/relationships" xmlns:ac="http://schemas.microsoft.com/office/drawing/2013/main/command" xmlns:pc="http://schemas.microsoft.com/office/powerpoint/2013/main/command">
+  <pc:docChgLst>
+    <pc:chgData name="Robbin Bouwmeester" userId="1dbfebabfc25a55a" providerId="LiveId" clId="{75D63595-F797-482E-A4A0-2F4889B74D4F}"/>
+    <pc:docChg chg="undo custSel modSld">
+      <pc:chgData name="Robbin Bouwmeester" userId="1dbfebabfc25a55a" providerId="LiveId" clId="{75D63595-F797-482E-A4A0-2F4889B74D4F}" dt="2026-10-19T14:17:25.970" v="1105" actId="1036"/>
+      <pc:docMkLst>
+        <pc:docMk/>
+      </pc:docMkLst>
+      <pc:sldChg chg="modSp mod">
+        <pc:chgData name="Robbin Bouwmeester" userId="1dbfebabfc25a55a" providerId="LiveId" clId="{75D63595-F797-482E-A4A0-2F4889B74D4F}" dt="2026-10-19T13:50:57.567" v="88" actId="20577"/>
+        <pc:sldMkLst>
+          <pc:docMk/>
+          <pc:sldMk cId="3356898013" sldId="257"/>
+        </pc:sldMkLst>
+        <pc:spChg chg="mod">
+          <ac:chgData name="Robbin Bouwmeester" userId="1dbfebabfc25a55a" providerId="LiveId" clId="{75D63595-F797-482E-A4A0-2F4889B74D4F}" dt="2026-10-19T13:50:57.567" v="88" actId="20577"/>
+          <ac:spMkLst>
+            <pc:docMk/>
+            <pc:sldMk cId="3356898013" sldId="257"/>
+            <ac:spMk id="3" creationId="{587FF1BE-ED64-2280-A163-BD846C39B6E7}"/>
+          </ac:spMkLst>
+        </pc:spChg>
+      </pc:sldChg>
+      <pc:sldChg chg="modSp mod">
+        <pc:chgData name="Robbin Bouwmeester" userId="1dbfebabfc25a55a" providerId="LiveId" clId="{75D63595-F797-482E-A4A0-2F4889B74D4F}" dt="2026-10-19T13:51:32.818" v="147" actId="20577"/>
+        <pc:sldMkLst>
+          <pc:docMk/>
+          <pc:sldMk cId="3611885306" sldId="258"/>
+        </pc:sldMkLst>
+        <pc:spChg chg="mod">
+          <ac:chgData name="Robbin Bouwmeester" userId="1dbfebabfc25a55a" providerId="LiveId" clId="{75D63595-F797-482E-A4A0-2F4889B74D4F}" dt="2026-10-19T13:51:32.818" v="147" actId="20577"/>
+          <ac:spMkLst>
+            <pc:docMk/>
+            <pc:sldMk cId="3611885306" sldId="258"/>
+            <ac:spMk id="6" creationId="{1DC30759-B1BD-CAA3-8C2B-4FEFF4A3B8C6}"/>
+          </ac:spMkLst>
+        </pc:spChg>
+      </pc:sldChg>
+      <pc:sldChg chg="modSp mod">
+        <pc:chgData name="Robbin Bouwmeester" userId="1dbfebabfc25a55a" providerId="LiveId" clId="{75D63595-F797-482E-A4A0-2F4889B74D4F}" dt="2026-10-19T13:52:14.279" v="260" actId="20577"/>
+        <pc:sldMkLst>
+          <pc:docMk/>
+          <pc:sldMk cId="1117750815" sldId="259"/>
+        </pc:sldMkLst>
+        <pc:spChg chg="mod">
+          <ac:chgData name="Robbin Bouwmeester" userId="1dbfebabfc25a55a" providerId="LiveId" clId="{75D63595-F797-482E-A4A0-2F4889B74D4F}" dt="2026-10-19T13:52:14.279" v="260" actId="20577"/>
+          <ac:spMkLst>
+            <pc:docMk/>
+            <pc:sldMk cId="1117750815" sldId="259"/>
+            <ac:spMk id="2" creationId="{1FF014C9-97C1-6488-7958-5ABF2919CC51}"/>
+          </ac:spMkLst>
+        </pc:spChg>
+      </pc:sldChg>
+      <pc:sldChg chg="modSp mod">
+        <pc:chgData name="Robbin Bouwmeester" userId="1dbfebabfc25a55a" providerId="LiveId" clId="{75D63595-F797-482E-A4A0-2F4889B74D4F}" dt="2026-10-19T13:52:45.990" v="351" actId="20577"/>
+        <pc:sldMkLst>
+          <pc:docMk/>
+          <pc:sldMk cId="945041652" sldId="260"/>
+        </pc:sldMkLst>
+        <pc:spChg chg="mod">
+          <ac:chgData name="Robbin Bouwmeester" userId="1dbfebabfc25a55a" providerId="LiveId" clId="{75D63595-F797-482E-A4A0-2F4889B74D4F}" dt="2026-10-19T13:52:45.990" v="351" actId="20577"/>
+          <ac:spMkLst>
+            <pc:docMk/>
+            <pc:sldMk cId="945041652" sldId="260"/>
+            <ac:spMk id="3" creationId="{14EC6E6B-FED1-32ED-DE31-BB1034F20494}"/>
+          </ac:spMkLst>
+        </pc:spChg>
+      </pc:sldChg>
+      <pc:sldChg chg="modSp mod">
+        <pc:chgData name="Robbin Bouwmeester" userId="1dbfebabfc25a55a" providerId="LiveId" clId="{75D63595-F797-482E-A4A0-2F4889B74D4F}" dt="2026-10-19T13:53:53.303" v="445" actId="20577"/>
+        <pc:sldMkLst>
+          <pc:docMk/>
+          <pc:sldMk cId="4260372237" sldId="261"/>
+        </pc:sldMkLst>
+        <pc:spChg chg="mod">
+          <ac:chgData name="Robbin Bouwmeester" userId="1dbfebabfc25a55a" providerId="LiveId" clId="{75D63595-F797-482E-A4A0-2F4889B74D4F}" dt="2026-10-19T13:53:53.303" v="445" actId="20577"/>
+          <ac:spMkLst>
+            <pc:docMk/>
+            <pc:sldMk cId="4260372237" sldId="261"/>
+            <ac:spMk id="4" creationId="{56C1FFBB-740A-1AFF-2AF2-0432F041C87F}"/>
+          </ac:spMkLst>
+        </pc:spChg>
+      </pc:sldChg>
+      <pc:sldChg chg="modSp mod">
+        <pc:chgData name="Robbin Bouwmeester" userId="1dbfebabfc25a55a" providerId="LiveId" clId="{75D63595-F797-482E-A4A0-2F4889B74D4F}" dt="2026-10-19T13:54:30.366" v="505" actId="5793"/>
+        <pc:sldMkLst>
+          <pc:docMk/>
+          <pc:sldMk cId="3470715690" sldId="262"/>
+        </pc:sldMkLst>
+        <pc:spChg chg="mod">
+          <ac:chgData name="Robbin Bouwmeester" userId="1dbfebabfc25a55a" providerId="LiveId" clId="{75D63595-F797-482E-A4A0-2F4889B74D4F}" dt="2026-10-19T13:54:30.366" v="505" actId="5793"/>
+          <ac:spMkLst>
+            <pc:docMk/>
+            <pc:sldMk cId="3470715690" sldId="262"/>
+            <ac:spMk id="6" creationId="{B7A5C175-1C73-D790-B022-5DF73A503328}"/>
+          </ac:spMkLst>
+        </pc:spChg>
+      </pc:sldChg>
+      <pc:sldChg chg="modSp mod">
+        <pc:chgData name="Robbin Bouwmeester" userId="1dbfebabfc25a55a" providerId="LiveId" clId="{75D63595-F797-482E-A4A0-2F4889B74D4F}" dt="2026-10-19T14:04:18.726" v="550" actId="20577"/>
+        <pc:sldMkLst>
+          <pc:docMk/>
+          <pc:sldMk cId="837213266" sldId="263"/>
+        </pc:sldMkLst>
+        <pc:spChg chg="mod">
+          <ac:chgData name="Robbin Bouwmeester" userId="1dbfebabfc25a55a" providerId="LiveId" clId="{75D63595-F797-482E-A4A0-2F4889B74D4F}" dt="2026-10-19T14:04:18.726" v="550" actId="20577"/>
+          <ac:spMkLst>
+            <pc:docMk/>
+            <pc:sldMk cId="837213266" sldId="263"/>
+            <ac:spMk id="6" creationId="{A0EAD717-6FA4-D6B8-7E6B-455915C5DD1C}"/>
+          </ac:spMkLst>
+        </pc:spChg>
+      </pc:sldChg>
+      <pc:sldChg chg="modSp mod">
+        <pc:chgData name="Robbin Bouwmeester" userId="1dbfebabfc25a55a" providerId="LiveId" clId="{75D63595-F797-482E-A4A0-2F4889B74D4F}" dt="2026-10-19T14:04:56.010" v="605" actId="20577"/>
+        <pc:sldMkLst>
+          <pc:docMk/>
+          <pc:sldMk cId="2024514924" sldId="264"/>
+        </pc:sldMkLst>
+        <pc:spChg chg="mod">
+          <ac:chgData name="Robbin Bouwmeester" userId="1dbfebabfc25a55a" providerId="LiveId" clId="{75D63595-F797-482E-A4A0-2F4889B74D4F}" dt="2026-10-19T14:04:56.010" v="605" actId="20577"/>
+          <ac:spMkLst>
+            <pc:docMk/>
+            <pc:sldMk cId="2024514924" sldId="264"/>
+            <ac:spMk id="2" creationId="{DE0FDBD2-BD30-6C61-DC0E-42FC0F4CADF7}"/>
+          </ac:spMkLst>
+        </pc:spChg>
+      </pc:sldChg>
+      <pc:sldChg chg="modSp">
+        <pc:chgData name="Robbin Bouwmeester" userId="1dbfebabfc25a55a" providerId="LiveId" clId="{75D63595-F797-482E-A4A0-2F4889B74D4F}" dt="2026-10-19T14:05:01.144" v="606"/>
+        <pc:sldMkLst>
+          <pc:docMk/>
+          <pc:sldMk cId="3557889374" sldId="265"/>
+        </pc:sldMkLst>
+        <pc:spChg chg="mod">
+          <ac:chgData name="Robbin Bouwmeester" userId="1dbfebabfc25a55a" providerId="LiveId" clId="{75D63595-F797-482E-A4A0-2F4889B74D4F}" dt="2026-10-19T14:05:01.144" v="606"/>
+          <ac:spMkLst>
+            <pc:docMk/>
+            <pc:sldMk cId="3557889374" sldId="265"/>
+            <ac:spMk id="2" creationId="{6861AB5E-DEF8-C899-9A52-FD16FE93A9A9}"/>
+          </ac:spMkLst>
+        </pc:spChg>
+      </pc:sldChg>
+      <pc:sldChg chg="modSp mod">
+        <pc:chgData name="Robbin Bouwmeester" userId="1dbfebabfc25a55a" providerId="LiveId" clId="{75D63595-F797-482E-A4A0-2F4889B74D4F}" dt="2026-10-19T14:06:14.254" v="750" actId="20577"/>
+        <pc:sldMkLst>
+          <pc:docMk/>
+          <pc:sldMk cId="3804878197" sldId="266"/>
+        </pc:sldMkLst>
+        <pc:spChg chg="mod">
+          <ac:chgData name="Robbin Bouwmeester" userId="1dbfebabfc25a55a" providerId="LiveId" clId="{75D63595-F797-482E-A4A0-2F4889B74D4F}" dt="2026-10-19T14:06:14.254" v="750" actId="20577"/>
+          <ac:spMkLst>
+            <pc:docMk/>
+            <pc:sldMk cId="3804878197" sldId="266"/>
+            <ac:spMk id="3" creationId="{6B29CFE7-6F4D-1049-ED8A-C2C91C19BCF9}"/>
+          </ac:spMkLst>
+        </pc:spChg>
+      </pc:sldChg>
+      <pc:sldChg chg="modSp">
+        <pc:chgData name="Robbin Bouwmeester" userId="1dbfebabfc25a55a" providerId="LiveId" clId="{75D63595-F797-482E-A4A0-2F4889B74D4F}" dt="2026-10-19T14:09:54.120" v="751"/>
+        <pc:sldMkLst>
+          <pc:docMk/>
+          <pc:sldMk cId="3563614284" sldId="267"/>
+        </pc:sldMkLst>
+        <pc:spChg chg="mod">
+          <ac:chgData name="Robbin Bouwmeester" userId="1dbfebabfc25a55a" providerId="LiveId" clId="{75D63595-F797-482E-A4A0-2F4889B74D4F}" dt="2026-10-19T14:09:54.120" v="751"/>
+          <ac:spMkLst>
+            <pc:docMk/>
+            <pc:sldMk cId="3563614284" sldId="267"/>
+            <ac:spMk id="2" creationId="{6C4ED5E5-F1E2-CC30-83C3-BC2A085408B6}"/>
+          </ac:spMkLst>
+        </pc:spChg>
+      </pc:sldChg>
+      <pc:sldChg chg="modSp mod">
+        <pc:chgData name="Robbin Bouwmeester" userId="1dbfebabfc25a55a" providerId="LiveId" clId="{75D63595-F797-482E-A4A0-2F4889B74D4F}" dt="2026-10-19T14:10:10.963" v="798" actId="20577"/>
+        <pc:sldMkLst>
+          <pc:docMk/>
+          <pc:sldMk cId="2468284909" sldId="268"/>
+        </pc:sldMkLst>
+        <pc:spChg chg="mod">
+          <ac:chgData name="Robbin Bouwmeester" userId="1dbfebabfc25a55a" providerId="LiveId" clId="{75D63595-F797-482E-A4A0-2F4889B74D4F}" dt="2026-10-19T14:10:10.963" v="798" actId="20577"/>
+          <ac:spMkLst>
+            <pc:docMk/>
+            <pc:sldMk cId="2468284909" sldId="268"/>
+            <ac:spMk id="6" creationId="{95CE728C-E1D1-08B1-F0CB-B4636E8A9002}"/>
+          </ac:spMkLst>
+        </pc:spChg>
+      </pc:sldChg>
+      <pc:sldChg chg="modSp mod">
+        <pc:chgData name="Robbin Bouwmeester" userId="1dbfebabfc25a55a" providerId="LiveId" clId="{75D63595-F797-482E-A4A0-2F4889B74D4F}" dt="2026-10-19T14:11:06.405" v="894" actId="20577"/>
+        <pc:sldMkLst>
+          <pc:docMk/>
+          <pc:sldMk cId="158681426" sldId="270"/>
+        </pc:sldMkLst>
+        <pc:spChg chg="mod">
+          <ac:chgData name="Robbin Bouwmeester" userId="1dbfebabfc25a55a" providerId="LiveId" clId="{75D63595-F797-482E-A4A0-2F4889B74D4F}" dt="2026-10-19T14:11:06.405" v="894" actId="20577"/>
+          <ac:spMkLst>
+            <pc:docMk/>
+            <pc:sldMk cId="158681426" sldId="270"/>
+            <ac:spMk id="4" creationId="{C56752D4-EE48-D015-ED61-97F2639E51FC}"/>
+          </ac:spMkLst>
+        </pc:spChg>
+      </pc:sldChg>
+      <pc:sldChg chg="modSp mod">
+        <pc:chgData name="Robbin Bouwmeester" userId="1dbfebabfc25a55a" providerId="LiveId" clId="{75D63595-F797-482E-A4A0-2F4889B74D4F}" dt="2026-10-19T14:12:32.939" v="977" actId="20577"/>
+        <pc:sldMkLst>
+          <pc:docMk/>
+          <pc:sldMk cId="1986776603" sldId="271"/>
+        </pc:sldMkLst>
+        <pc:spChg chg="mod">
+          <ac:chgData name="Robbin Bouwmeester" userId="1dbfebabfc25a55a" providerId="LiveId" clId="{75D63595-F797-482E-A4A0-2F4889B74D4F}" dt="2026-10-19T14:12:32.939" v="977" actId="20577"/>
+          <ac:spMkLst>
+            <pc:docMk/>
+            <pc:sldMk cId="1986776603" sldId="271"/>
+            <ac:spMk id="3" creationId="{F111A1BE-F453-F32B-F67A-51606772AF57}"/>
+          </ac:spMkLst>
+        </pc:spChg>
+      </pc:sldChg>
+      <pc:sldChg chg="modSp mod">
+        <pc:chgData name="Robbin Bouwmeester" userId="1dbfebabfc25a55a" providerId="LiveId" clId="{75D63595-F797-482E-A4A0-2F4889B74D4F}" dt="2026-10-19T14:17:11.137" v="1076" actId="6549"/>
+        <pc:sldMkLst>
+          <pc:docMk/>
+          <pc:sldMk cId="3641579934" sldId="272"/>
+        </pc:sldMkLst>
+        <pc:spChg chg="mod">
+          <ac:chgData name="Robbin Bouwmeester" userId="1dbfebabfc25a55a" providerId="LiveId" clId="{75D63595-F797-482E-A4A0-2F4889B74D4F}" dt="2026-10-19T14:17:11.137" v="1076" actId="6549"/>
+          <ac:spMkLst>
+            <pc:docMk/>
+            <pc:sldMk cId="3641579934" sldId="272"/>
+            <ac:spMk id="2" creationId="{60FFEB7E-0456-047E-1918-72CE2EA103BF}"/>
+          </ac:spMkLst>
+        </pc:spChg>
+      </pc:sldChg>
+      <pc:sldChg chg="modSp">
+        <pc:chgData name="Robbin Bouwmeester" userId="1dbfebabfc25a55a" providerId="LiveId" clId="{75D63595-F797-482E-A4A0-2F4889B74D4F}" dt="2026-10-19T14:17:17.072" v="1077"/>
+        <pc:sldMkLst>
+          <pc:docMk/>
+          <pc:sldMk cId="446268273" sldId="273"/>
+        </pc:sldMkLst>
+        <pc:spChg chg="mod">
+          <ac:chgData name="Robbin Bouwmeester" userId="1dbfebabfc25a55a" providerId="LiveId" clId="{75D63595-F797-482E-A4A0-2F4889B74D4F}" dt="2026-10-19T14:17:17.072" v="1077"/>
+          <ac:spMkLst>
+            <pc:docMk/>
+            <pc:sldMk cId="446268273" sldId="273"/>
+            <ac:spMk id="2" creationId="{CA1D4FAF-7AE0-781B-E2B6-153EF84F65EE}"/>
+          </ac:spMkLst>
+        </pc:spChg>
+      </pc:sldChg>
+      <pc:sldChg chg="modSp mod">
+        <pc:chgData name="Robbin Bouwmeester" userId="1dbfebabfc25a55a" providerId="LiveId" clId="{75D63595-F797-482E-A4A0-2F4889B74D4F}" dt="2026-10-19T14:17:25.970" v="1105" actId="1036"/>
+        <pc:sldMkLst>
+          <pc:docMk/>
+          <pc:sldMk cId="771616345" sldId="274"/>
+        </pc:sldMkLst>
+        <pc:spChg chg="mod">
+          <ac:chgData name="Robbin Bouwmeester" userId="1dbfebabfc25a55a" providerId="LiveId" clId="{75D63595-F797-482E-A4A0-2F4889B74D4F}" dt="2026-10-19T14:17:19.381" v="1078"/>
+          <ac:spMkLst>
+            <pc:docMk/>
+            <pc:sldMk cId="771616345" sldId="274"/>
+            <ac:spMk id="5" creationId="{B640CDB0-F0A1-A73A-BFB5-925398C23DEE}"/>
+          </ac:spMkLst>
+        </pc:spChg>
+        <pc:picChg chg="mod">
+          <ac:chgData name="Robbin Bouwmeester" userId="1dbfebabfc25a55a" providerId="LiveId" clId="{75D63595-F797-482E-A4A0-2F4889B74D4F}" dt="2026-10-19T14:17:25.970" v="1105" actId="1036"/>
+          <ac:picMkLst>
+            <pc:docMk/>
+            <pc:sldMk cId="771616345" sldId="274"/>
+            <ac:picMk id="2" creationId="{00000000-0000-0000-0000-000000000000}"/>
+          </ac:picMkLst>
+        </pc:picChg>
+        <pc:picChg chg="mod">
+          <ac:chgData name="Robbin Bouwmeester" userId="1dbfebabfc25a55a" providerId="LiveId" clId="{75D63595-F797-482E-A4A0-2F4889B74D4F}" dt="2026-10-19T14:17:25.970" v="1105" actId="1036"/>
+          <ac:picMkLst>
+            <pc:docMk/>
+            <pc:sldMk cId="771616345" sldId="274"/>
+            <ac:picMk id="4" creationId="{00000000-0000-0000-0000-000000000000}"/>
+          </ac:picMkLst>
+        </pc:picChg>
+      </pc:sldChg>
+    </pc:docChg>
+  </pc:docChgLst>
+</pc:chgInfo>
+</file>
+
 <file path=ppt/notesMasters/notesMaster1.xml><?xml version="1.0" encoding="utf-8"?>
 <p:notesMaster xmlns:a="http://schemas.openxmlformats.org/drawingml/2006/main" xmlns:r="http://schemas.openxmlformats.org/officeDocument/2006/relationships" xmlns:p="http://schemas.openxmlformats.org/presentationml/2006/main">
   <p:cSld>
@@ -213,7 +506,7 @@
           <a:p>
             <a:fld id="{B8AA53F8-D549-4BCE-B564-8781C50B17EE}" type="datetimeFigureOut">
               <a:rPr lang="en-GB" smtClean="0"/>
-              <a:t>01/03/2026</a:t>
+              <a:t>19/10/2026</a:t>
             </a:fld>
             <a:endParaRPr lang="en-GB"/>
           </a:p>
@@ -1959,7 +2252,7 @@
           <a:p>
             <a:fld id="{A1E18CBC-0603-47A6-97E2-86255A82367C}" type="datetimeFigureOut">
               <a:rPr lang="en-GB" smtClean="0"/>
-              <a:t>01/03/2026</a:t>
+              <a:t>19/10/2026</a:t>
             </a:fld>
             <a:endParaRPr lang="en-GB"/>
           </a:p>
@@ -2129,7 +2422,7 @@
           <a:p>
             <a:fld id="{A1E18CBC-0603-47A6-97E2-86255A82367C}" type="datetimeFigureOut">
               <a:rPr lang="en-GB" smtClean="0"/>
-              <a:t>01/03/2026</a:t>
+              <a:t>19/10/2026</a:t>
             </a:fld>
             <a:endParaRPr lang="en-GB"/>
           </a:p>
@@ -2309,7 +2602,7 @@
           <a:p>
             <a:fld id="{A1E18CBC-0603-47A6-97E2-86255A82367C}" type="datetimeFigureOut">
               <a:rPr lang="en-GB" smtClean="0"/>
-              <a:t>01/03/2026</a:t>
+              <a:t>19/10/2026</a:t>
             </a:fld>
             <a:endParaRPr lang="en-GB"/>
           </a:p>
@@ -2479,7 +2772,7 @@
           <a:p>
             <a:fld id="{A1E18CBC-0603-47A6-97E2-86255A82367C}" type="datetimeFigureOut">
               <a:rPr lang="en-GB" smtClean="0"/>
-              <a:t>01/03/2026</a:t>
+              <a:t>19/10/2026</a:t>
             </a:fld>
             <a:endParaRPr lang="en-GB"/>
           </a:p>
@@ -2725,7 +3018,7 @@
           <a:p>
             <a:fld id="{A1E18CBC-0603-47A6-97E2-86255A82367C}" type="datetimeFigureOut">
               <a:rPr lang="en-GB" smtClean="0"/>
-              <a:t>01/03/2026</a:t>
+              <a:t>19/10/2026</a:t>
             </a:fld>
             <a:endParaRPr lang="en-GB"/>
           </a:p>
@@ -2957,7 +3250,7 @@
           <a:p>
             <a:fld id="{A1E18CBC-0603-47A6-97E2-86255A82367C}" type="datetimeFigureOut">
               <a:rPr lang="en-GB" smtClean="0"/>
-              <a:t>01/03/2026</a:t>
+              <a:t>19/10/2026</a:t>
             </a:fld>
             <a:endParaRPr lang="en-GB"/>
           </a:p>
@@ -3324,7 +3617,7 @@
           <a:p>
             <a:fld id="{A1E18CBC-0603-47A6-97E2-86255A82367C}" type="datetimeFigureOut">
               <a:rPr lang="en-GB" smtClean="0"/>
-              <a:t>01/03/2026</a:t>
+              <a:t>19/10/2026</a:t>
             </a:fld>
             <a:endParaRPr lang="en-GB"/>
           </a:p>
@@ -3442,7 +3735,7 @@
           <a:p>
             <a:fld id="{A1E18CBC-0603-47A6-97E2-86255A82367C}" type="datetimeFigureOut">
               <a:rPr lang="en-GB" smtClean="0"/>
-              <a:t>01/03/2026</a:t>
+              <a:t>19/10/2026</a:t>
             </a:fld>
             <a:endParaRPr lang="en-GB"/>
           </a:p>
@@ -3537,7 +3830,7 @@
           <a:p>
             <a:fld id="{A1E18CBC-0603-47A6-97E2-86255A82367C}" type="datetimeFigureOut">
               <a:rPr lang="en-GB" smtClean="0"/>
-              <a:t>01/03/2026</a:t>
+              <a:t>19/10/2026</a:t>
             </a:fld>
             <a:endParaRPr lang="en-GB"/>
           </a:p>
@@ -3814,7 +4107,7 @@
           <a:p>
             <a:fld id="{A1E18CBC-0603-47A6-97E2-86255A82367C}" type="datetimeFigureOut">
               <a:rPr lang="en-GB" smtClean="0"/>
-              <a:t>01/03/2026</a:t>
+              <a:t>19/10/2026</a:t>
             </a:fld>
             <a:endParaRPr lang="en-GB"/>
           </a:p>
@@ -4067,7 +4360,7 @@
           <a:p>
             <a:fld id="{A1E18CBC-0603-47A6-97E2-86255A82367C}" type="datetimeFigureOut">
               <a:rPr lang="en-GB" smtClean="0"/>
-              <a:t>01/03/2026</a:t>
+              <a:t>19/10/2026</a:t>
             </a:fld>
             <a:endParaRPr lang="en-GB"/>
           </a:p>
@@ -4280,7 +4573,7 @@
           <a:p>
             <a:fld id="{A1E18CBC-0603-47A6-97E2-86255A82367C}" type="datetimeFigureOut">
               <a:rPr lang="en-GB" smtClean="0"/>
-              <a:t>01/03/2026</a:t>
+              <a:t>19/10/2026</a:t>
             </a:fld>
             <a:endParaRPr lang="en-GB"/>
           </a:p>
@@ -4840,7 +5133,7 @@
         <p:spPr>
           <a:xfrm>
             <a:off x="241301" y="129804"/>
-            <a:ext cx="11747500" cy="523220"/>
+            <a:ext cx="11747500" cy="1015663"/>
           </a:xfrm>
           <a:prstGeom prst="rect">
             <a:avLst/>
@@ -4854,15 +5147,15 @@
           <a:lstStyle/>
           <a:p>
             <a:r>
-              <a:rPr lang="en-US" sz="2800" dirty="0">
-                <a:latin typeface="+mj-lt"/>
+              <a:rPr lang="en-US" sz="3000" b="1" dirty="0">
+                <a:latin typeface="Corbel" panose="020B0503020204020204" pitchFamily="34" charset="0"/>
                 <a:ea typeface="Lato" panose="020B0604020202020204" pitchFamily="34" charset="0"/>
                 <a:cs typeface="Helvetica" panose="020B0604020202020204" pitchFamily="34" charset="0"/>
               </a:rPr>
-              <a:t>regression</a:t>
-            </a:r>
-            <a:endParaRPr lang="en-GB" sz="2800" dirty="0">
-              <a:latin typeface="+mj-lt"/>
+              <a:t>Regression models the behavior between features and continuous target values</a:t>
+            </a:r>
+            <a:endParaRPr lang="en-GB" sz="3000" b="1" dirty="0">
+              <a:latin typeface="Corbel" panose="020B0503020204020204" pitchFamily="34" charset="0"/>
               <a:ea typeface="Lato" panose="020B0604020202020204" pitchFamily="34" charset="0"/>
               <a:cs typeface="Helvetica" panose="020B0604020202020204" pitchFamily="34" charset="0"/>
             </a:endParaRPr>
@@ -5099,15 +5392,14 @@
           <a:lstStyle/>
           <a:p>
             <a:r>
-              <a:rPr lang="en-US" sz="2800" dirty="0">
-                <a:latin typeface="+mj-lt"/>
+              <a:rPr lang="en-US" sz="2800" b="1" dirty="0">
+                <a:latin typeface="Corbel" panose="020B0503020204020204" pitchFamily="34" charset="0"/>
                 <a:ea typeface="Lato" panose="020B0604020202020204" pitchFamily="34" charset="0"/>
                 <a:cs typeface="Helvetica" panose="020B0604020202020204" pitchFamily="34" charset="0"/>
               </a:rPr>
-              <a:t>linear regression</a:t>
+              <a:t>Linear regression formalized and associated cost function</a:t>
             </a:r>
             <a:endParaRPr lang="en-GB" sz="2800" dirty="0">
-              <a:latin typeface="+mj-lt"/>
               <a:ea typeface="Lato" panose="020B0604020202020204" pitchFamily="34" charset="0"/>
               <a:cs typeface="Helvetica" panose="020B0604020202020204" pitchFamily="34" charset="0"/>
             </a:endParaRPr>
@@ -5254,15 +5546,14 @@
           <a:lstStyle/>
           <a:p>
             <a:r>
-              <a:rPr lang="en-US" sz="2800" dirty="0">
-                <a:latin typeface="+mj-lt"/>
+              <a:rPr lang="en-US" sz="2800" b="1" dirty="0">
+                <a:latin typeface="Corbel" panose="020B0503020204020204" pitchFamily="34" charset="0"/>
                 <a:ea typeface="Lato" panose="020B0604020202020204" pitchFamily="34" charset="0"/>
                 <a:cs typeface="Helvetica" panose="020B0604020202020204" pitchFamily="34" charset="0"/>
               </a:rPr>
-              <a:t>linear regression: cost (loss function)</a:t>
+              <a:t>Linear regression formalized and associated cost function</a:t>
             </a:r>
             <a:endParaRPr lang="en-GB" sz="2800" dirty="0">
-              <a:latin typeface="+mj-lt"/>
               <a:ea typeface="Lato" panose="020B0604020202020204" pitchFamily="34" charset="0"/>
               <a:cs typeface="Helvetica" panose="020B0604020202020204" pitchFamily="34" charset="0"/>
             </a:endParaRPr>
@@ -5424,15 +5715,14 @@
           <a:lstStyle/>
           <a:p>
             <a:r>
-              <a:rPr lang="en-US" sz="2800" dirty="0">
-                <a:latin typeface="+mj-lt"/>
+              <a:rPr lang="en-US" sz="2800" b="1" dirty="0">
+                <a:latin typeface="Corbel" panose="020B0503020204020204" pitchFamily="34" charset="0"/>
                 <a:ea typeface="Lato" panose="020B0604020202020204" pitchFamily="34" charset="0"/>
                 <a:cs typeface="Helvetica" panose="020B0604020202020204" pitchFamily="34" charset="0"/>
               </a:rPr>
-              <a:t>gradient descent</a:t>
+              <a:t>Linear regression uses gradient descent to optimize parameters</a:t>
             </a:r>
             <a:endParaRPr lang="en-GB" sz="2800" dirty="0">
-              <a:latin typeface="+mj-lt"/>
               <a:ea typeface="Lato" panose="020B0604020202020204" pitchFamily="34" charset="0"/>
               <a:cs typeface="Helvetica" panose="020B0604020202020204" pitchFamily="34" charset="0"/>
             </a:endParaRPr>
@@ -5556,7 +5846,7 @@
         <p:spPr>
           <a:xfrm>
             <a:off x="241301" y="129804"/>
-            <a:ext cx="11747500" cy="523220"/>
+            <a:ext cx="11747500" cy="954107"/>
           </a:xfrm>
           <a:prstGeom prst="rect">
             <a:avLst/>
@@ -5570,15 +5860,14 @@
           <a:lstStyle/>
           <a:p>
             <a:r>
-              <a:rPr lang="en-US" sz="2800" dirty="0">
-                <a:latin typeface="+mj-lt"/>
+              <a:rPr lang="en-US" sz="2800" b="1" dirty="0">
+                <a:latin typeface="Corbel" panose="020B0503020204020204" pitchFamily="34" charset="0"/>
                 <a:ea typeface="Lato" panose="020B0604020202020204" pitchFamily="34" charset="0"/>
                 <a:cs typeface="Helvetica" panose="020B0604020202020204" pitchFamily="34" charset="0"/>
               </a:rPr>
-              <a:t>gradient descent: learning rate</a:t>
+              <a:t>Gradient descent uses a scaling factor (learning rate) to determine the size of the parameter change</a:t>
             </a:r>
             <a:endParaRPr lang="en-GB" sz="2800" dirty="0">
-              <a:latin typeface="+mj-lt"/>
               <a:ea typeface="Lato" panose="020B0604020202020204" pitchFamily="34" charset="0"/>
               <a:cs typeface="Helvetica" panose="020B0604020202020204" pitchFamily="34" charset="0"/>
             </a:endParaRPr>
@@ -6011,12 +6300,12 @@
           <a:lstStyle/>
           <a:p>
             <a:r>
-              <a:rPr lang="en-US" sz="2800" dirty="0">
-                <a:latin typeface="+mj-lt"/>
+              <a:rPr lang="en-US" sz="2800" b="1" dirty="0">
+                <a:latin typeface="Corbel" panose="020B0503020204020204" pitchFamily="34" charset="0"/>
                 <a:ea typeface="Lato" panose="020B0604020202020204" pitchFamily="34" charset="0"/>
                 <a:cs typeface="Helvetica" panose="020B0604020202020204" pitchFamily="34" charset="0"/>
               </a:rPr>
-              <a:t>linear regression</a:t>
+              <a:t>Gradient descent to set parameter values that minimize the cost function</a:t>
             </a:r>
             <a:endParaRPr lang="en-GB" sz="2800" dirty="0">
               <a:latin typeface="+mj-lt"/>
@@ -6245,7 +6534,7 @@
         <p:spPr>
           <a:xfrm>
             <a:off x="241301" y="129804"/>
-            <a:ext cx="11747500" cy="523220"/>
+            <a:ext cx="11747500" cy="954107"/>
           </a:xfrm>
           <a:prstGeom prst="rect">
             <a:avLst/>
@@ -6259,15 +6548,14 @@
           <a:lstStyle/>
           <a:p>
             <a:r>
-              <a:rPr lang="en-US" sz="2800" dirty="0">
-                <a:latin typeface="+mj-lt"/>
+              <a:rPr lang="en-US" sz="2800" b="1" dirty="0">
+                <a:latin typeface="Corbel" panose="020B0503020204020204" pitchFamily="34" charset="0"/>
                 <a:ea typeface="Lato" panose="020B0604020202020204" pitchFamily="34" charset="0"/>
                 <a:cs typeface="Helvetica" panose="020B0604020202020204" pitchFamily="34" charset="0"/>
               </a:rPr>
-              <a:t>non-linear regression</a:t>
+              <a:t>Non-linear regression through taking higher order polynomials for the feature values</a:t>
             </a:r>
             <a:endParaRPr lang="en-GB" sz="2800" dirty="0">
-              <a:latin typeface="+mj-lt"/>
               <a:ea typeface="Lato" panose="020B0604020202020204" pitchFamily="34" charset="0"/>
               <a:cs typeface="Helvetica" panose="020B0604020202020204" pitchFamily="34" charset="0"/>
             </a:endParaRPr>
@@ -6523,7 +6811,7 @@
         <p:spPr>
           <a:xfrm>
             <a:off x="241301" y="129804"/>
-            <a:ext cx="11747500" cy="523220"/>
+            <a:ext cx="11747500" cy="954107"/>
           </a:xfrm>
           <a:prstGeom prst="rect">
             <a:avLst/>
@@ -6537,15 +6825,14 @@
           <a:lstStyle/>
           <a:p>
             <a:r>
-              <a:rPr lang="en-US" sz="2800" dirty="0">
-                <a:latin typeface="+mj-lt"/>
+              <a:rPr lang="en-US" sz="2800" b="1" dirty="0">
+                <a:latin typeface="Corbel" panose="020B0503020204020204" pitchFamily="34" charset="0"/>
                 <a:ea typeface="Lato" panose="020B0604020202020204" pitchFamily="34" charset="0"/>
                 <a:cs typeface="Helvetica" panose="020B0604020202020204" pitchFamily="34" charset="0"/>
               </a:rPr>
-              <a:t>non-linear regression</a:t>
+              <a:t>Non-linear regression through taking higher order polynomials for the feature values</a:t>
             </a:r>
             <a:endParaRPr lang="en-GB" sz="2800" dirty="0">
-              <a:latin typeface="+mj-lt"/>
               <a:ea typeface="Lato" panose="020B0604020202020204" pitchFamily="34" charset="0"/>
               <a:cs typeface="Helvetica" panose="020B0604020202020204" pitchFamily="34" charset="0"/>
             </a:endParaRPr>
@@ -6598,7 +6885,7 @@
         </p:blipFill>
         <p:spPr>
           <a:xfrm>
-            <a:off x="3717926" y="467015"/>
+            <a:off x="3717926" y="870285"/>
             <a:ext cx="4895850" cy="4819650"/>
           </a:xfrm>
           <a:prstGeom prst="rect">
@@ -6622,7 +6909,7 @@
         </p:blipFill>
         <p:spPr>
           <a:xfrm>
-            <a:off x="1057638" y="5490657"/>
+            <a:off x="1057638" y="5893927"/>
             <a:ext cx="10601325" cy="542925"/>
           </a:xfrm>
           <a:prstGeom prst="rect">
@@ -6645,7 +6932,7 @@
         <p:spPr>
           <a:xfrm>
             <a:off x="241301" y="129804"/>
-            <a:ext cx="11747500" cy="523220"/>
+            <a:ext cx="11747500" cy="954107"/>
           </a:xfrm>
           <a:prstGeom prst="rect">
             <a:avLst/>
@@ -6659,15 +6946,14 @@
           <a:lstStyle/>
           <a:p>
             <a:r>
-              <a:rPr lang="en-US" sz="2800" dirty="0">
-                <a:latin typeface="+mj-lt"/>
+              <a:rPr lang="en-US" sz="2800" b="1" dirty="0">
+                <a:latin typeface="Corbel" panose="020B0503020204020204" pitchFamily="34" charset="0"/>
                 <a:ea typeface="Lato" panose="020B0604020202020204" pitchFamily="34" charset="0"/>
                 <a:cs typeface="Helvetica" panose="020B0604020202020204" pitchFamily="34" charset="0"/>
               </a:rPr>
-              <a:t>non-linear regression</a:t>
+              <a:t>Non-linear regression through taking higher order polynomials for the feature values</a:t>
             </a:r>
             <a:endParaRPr lang="en-GB" sz="2800" dirty="0">
-              <a:latin typeface="+mj-lt"/>
               <a:ea typeface="Lato" panose="020B0604020202020204" pitchFamily="34" charset="0"/>
               <a:cs typeface="Helvetica" panose="020B0604020202020204" pitchFamily="34" charset="0"/>
             </a:endParaRPr>
@@ -6973,7 +7259,7 @@
         <p:spPr>
           <a:xfrm>
             <a:off x="241301" y="129804"/>
-            <a:ext cx="11747500" cy="523220"/>
+            <a:ext cx="11747500" cy="954107"/>
           </a:xfrm>
           <a:prstGeom prst="rect">
             <a:avLst/>
@@ -6987,15 +7273,15 @@
           <a:lstStyle/>
           <a:p>
             <a:r>
-              <a:rPr lang="en-US" sz="2800" dirty="0">
-                <a:latin typeface="+mj-lt"/>
+              <a:rPr lang="en-US" sz="2800" b="1" dirty="0">
+                <a:latin typeface="Corbel" panose="020B0503020204020204" pitchFamily="34" charset="0"/>
                 <a:ea typeface="Lato" panose="020B0604020202020204" pitchFamily="34" charset="0"/>
                 <a:cs typeface="Helvetica" panose="020B0604020202020204" pitchFamily="34" charset="0"/>
               </a:rPr>
-              <a:t>linear regression</a:t>
-            </a:r>
-            <a:endParaRPr lang="en-GB" sz="2800" dirty="0">
-              <a:latin typeface="+mj-lt"/>
+              <a:t>Linear regression models assumes the relation between features and continuous target values is linear</a:t>
+            </a:r>
+            <a:endParaRPr lang="en-GB" sz="2800" b="1" dirty="0">
+              <a:latin typeface="Corbel" panose="020B0503020204020204" pitchFamily="34" charset="0"/>
               <a:ea typeface="Lato" panose="020B0604020202020204" pitchFamily="34" charset="0"/>
               <a:cs typeface="Helvetica" panose="020B0604020202020204" pitchFamily="34" charset="0"/>
             </a:endParaRPr>
@@ -7249,7 +7535,7 @@
         <p:spPr>
           <a:xfrm>
             <a:off x="241301" y="129804"/>
-            <a:ext cx="11747500" cy="523220"/>
+            <a:ext cx="11747500" cy="954107"/>
           </a:xfrm>
           <a:prstGeom prst="rect">
             <a:avLst/>
@@ -7263,15 +7549,15 @@
           <a:lstStyle/>
           <a:p>
             <a:r>
-              <a:rPr lang="en-US" sz="2800" dirty="0">
-                <a:latin typeface="+mj-lt"/>
+              <a:rPr lang="en-US" sz="2800" b="1" dirty="0">
+                <a:latin typeface="Corbel" panose="020B0503020204020204" pitchFamily="34" charset="0"/>
                 <a:ea typeface="Lato" panose="020B0604020202020204" pitchFamily="34" charset="0"/>
                 <a:cs typeface="Helvetica" panose="020B0604020202020204" pitchFamily="34" charset="0"/>
               </a:rPr>
-              <a:t>linear regression</a:t>
-            </a:r>
-            <a:endParaRPr lang="en-GB" sz="2800" dirty="0">
-              <a:latin typeface="+mj-lt"/>
+              <a:t>Linear regression models can be expressed as a simple equation containing trainable parameters and features</a:t>
+            </a:r>
+            <a:endParaRPr lang="en-GB" sz="2800" b="1" dirty="0">
+              <a:latin typeface="Corbel" panose="020B0503020204020204" pitchFamily="34" charset="0"/>
               <a:ea typeface="Lato" panose="020B0604020202020204" pitchFamily="34" charset="0"/>
               <a:cs typeface="Helvetica" panose="020B0604020202020204" pitchFamily="34" charset="0"/>
             </a:endParaRPr>
@@ -7453,7 +7739,7 @@
         <p:spPr>
           <a:xfrm>
             <a:off x="241301" y="129804"/>
-            <a:ext cx="11747500" cy="523220"/>
+            <a:ext cx="11747500" cy="954107"/>
           </a:xfrm>
           <a:prstGeom prst="rect">
             <a:avLst/>
@@ -7467,18 +7753,13 @@
           <a:lstStyle/>
           <a:p>
             <a:r>
-              <a:rPr lang="en-US" sz="2800" dirty="0">
-                <a:latin typeface="+mj-lt"/>
+              <a:rPr lang="en-US" sz="2800" b="1" dirty="0">
+                <a:latin typeface="Corbel" panose="020B0503020204020204" pitchFamily="34" charset="0"/>
                 <a:ea typeface="Lato" panose="020B0604020202020204" pitchFamily="34" charset="0"/>
                 <a:cs typeface="Helvetica" panose="020B0604020202020204" pitchFamily="34" charset="0"/>
               </a:rPr>
-              <a:t>linear regression: prediction</a:t>
-            </a:r>
-            <a:endParaRPr lang="en-GB" sz="2800" dirty="0">
-              <a:latin typeface="+mj-lt"/>
-              <a:ea typeface="Lato" panose="020B0604020202020204" pitchFamily="34" charset="0"/>
-              <a:cs typeface="Helvetica" panose="020B0604020202020204" pitchFamily="34" charset="0"/>
-            </a:endParaRPr>
+              <a:t>Linear regression models are capable of predicting new values when only the feature is known</a:t>
+            </a:r>
           </a:p>
         </p:txBody>
       </p:sp>
@@ -7795,18 +8076,13 @@
           <a:lstStyle/>
           <a:p>
             <a:r>
-              <a:rPr lang="en-US" sz="2800" dirty="0">
-                <a:latin typeface="+mj-lt"/>
+              <a:rPr lang="en-US" sz="2800" b="1" dirty="0">
+                <a:latin typeface="Corbel" panose="020B0503020204020204" pitchFamily="34" charset="0"/>
                 <a:ea typeface="Lato" panose="020B0604020202020204" pitchFamily="34" charset="0"/>
                 <a:cs typeface="Helvetica" panose="020B0604020202020204" pitchFamily="34" charset="0"/>
               </a:rPr>
-              <a:t>linear regression: fitting</a:t>
-            </a:r>
-            <a:endParaRPr lang="en-GB" sz="2800" dirty="0">
-              <a:latin typeface="+mj-lt"/>
-              <a:ea typeface="Lato" panose="020B0604020202020204" pitchFamily="34" charset="0"/>
-              <a:cs typeface="Helvetica" panose="020B0604020202020204" pitchFamily="34" charset="0"/>
-            </a:endParaRPr>
+              <a:t>There are multiple ways you can fit a linear model through training data</a:t>
+            </a:r>
           </a:p>
         </p:txBody>
       </p:sp>
@@ -8045,18 +8321,13 @@
           <a:lstStyle/>
           <a:p>
             <a:r>
-              <a:rPr lang="en-US" sz="2800" dirty="0">
-                <a:latin typeface="+mj-lt"/>
+              <a:rPr lang="en-US" sz="2800" b="1" dirty="0">
+                <a:latin typeface="Corbel" panose="020B0503020204020204" pitchFamily="34" charset="0"/>
                 <a:ea typeface="Lato" panose="020B0604020202020204" pitchFamily="34" charset="0"/>
                 <a:cs typeface="Helvetica" panose="020B0604020202020204" pitchFamily="34" charset="0"/>
               </a:rPr>
-              <a:t>linear regression: fitting (coefficient of determination)</a:t>
-            </a:r>
-            <a:endParaRPr lang="en-GB" sz="2800" dirty="0">
-              <a:latin typeface="+mj-lt"/>
-              <a:ea typeface="Lato" panose="020B0604020202020204" pitchFamily="34" charset="0"/>
-              <a:cs typeface="Helvetica" panose="020B0604020202020204" pitchFamily="34" charset="0"/>
-            </a:endParaRPr>
+              <a:t>Some parameter values are better than others …</a:t>
+            </a:r>
           </a:p>
         </p:txBody>
       </p:sp>
@@ -8810,18 +9081,13 @@
           <a:lstStyle/>
           <a:p>
             <a:r>
-              <a:rPr lang="en-US" sz="2800" dirty="0">
-                <a:latin typeface="+mj-lt"/>
+              <a:rPr lang="en-US" sz="2800" b="1" dirty="0">
+                <a:latin typeface="Corbel" panose="020B0503020204020204" pitchFamily="34" charset="0"/>
                 <a:ea typeface="Lato" panose="020B0604020202020204" pitchFamily="34" charset="0"/>
                 <a:cs typeface="Helvetica" panose="020B0604020202020204" pitchFamily="34" charset="0"/>
               </a:rPr>
-              <a:t>linear regression: formalized</a:t>
-            </a:r>
-            <a:endParaRPr lang="en-GB" sz="2800" dirty="0">
-              <a:latin typeface="+mj-lt"/>
-              <a:ea typeface="Lato" panose="020B0604020202020204" pitchFamily="34" charset="0"/>
-              <a:cs typeface="Helvetica" panose="020B0604020202020204" pitchFamily="34" charset="0"/>
-            </a:endParaRPr>
+              <a:t>Linear regression formalized as equation</a:t>
+            </a:r>
           </a:p>
         </p:txBody>
       </p:sp>
@@ -8932,12 +9198,12 @@
           <a:lstStyle/>
           <a:p>
             <a:r>
-              <a:rPr lang="en-US" sz="2800" dirty="0">
-                <a:latin typeface="+mj-lt"/>
+              <a:rPr lang="en-US" sz="2800" b="1" dirty="0">
+                <a:latin typeface="Corbel" panose="020B0503020204020204" pitchFamily="34" charset="0"/>
                 <a:ea typeface="Lato" panose="020B0604020202020204" pitchFamily="34" charset="0"/>
                 <a:cs typeface="Helvetica" panose="020B0604020202020204" pitchFamily="34" charset="0"/>
               </a:rPr>
-              <a:t>linear regression: cost (loss function)</a:t>
+              <a:t>Linear regression cost function for different parameter values</a:t>
             </a:r>
             <a:endParaRPr lang="en-GB" sz="2800" dirty="0">
               <a:latin typeface="+mj-lt"/>
@@ -9186,15 +9452,14 @@
           <a:lstStyle/>
           <a:p>
             <a:r>
-              <a:rPr lang="en-US" sz="2800" dirty="0">
-                <a:latin typeface="+mj-lt"/>
+              <a:rPr lang="en-US" sz="2800" b="1" dirty="0">
+                <a:latin typeface="Corbel" panose="020B0503020204020204" pitchFamily="34" charset="0"/>
                 <a:ea typeface="Lato" panose="020B0604020202020204" pitchFamily="34" charset="0"/>
                 <a:cs typeface="Helvetica" panose="020B0604020202020204" pitchFamily="34" charset="0"/>
               </a:rPr>
-              <a:t>linear regression: cost (loss function)</a:t>
+              <a:t>Linear regression cost function for different parameter values</a:t>
             </a:r>
             <a:endParaRPr lang="en-GB" sz="2800" dirty="0">
-              <a:latin typeface="+mj-lt"/>
               <a:ea typeface="Lato" panose="020B0604020202020204" pitchFamily="34" charset="0"/>
               <a:cs typeface="Helvetica" panose="020B0604020202020204" pitchFamily="34" charset="0"/>
             </a:endParaRPr>
